--- a/pota_agentic_ai.pptx
+++ b/pota_agentic_ai.pptx
@@ -5,22 +5,22 @@
     <p:sldMasterId id="2147483648" r:id="rId1"/>
   </p:sldMasterIdLst>
   <p:sldIdLst>
-    <p:sldId id="256" r:id="rId7"/>
-    <p:sldId id="257" r:id="rId8"/>
-    <p:sldId id="258" r:id="rId9"/>
-    <p:sldId id="259" r:id="rId10"/>
-    <p:sldId id="260" r:id="rId11"/>
-    <p:sldId id="261" r:id="rId12"/>
-    <p:sldId id="262" r:id="rId13"/>
-    <p:sldId id="263" r:id="rId14"/>
-    <p:sldId id="264" r:id="rId15"/>
-    <p:sldId id="265" r:id="rId16"/>
-    <p:sldId id="266" r:id="rId17"/>
-    <p:sldId id="267" r:id="rId18"/>
-    <p:sldId id="268" r:id="rId19"/>
-    <p:sldId id="269" r:id="rId20"/>
+    <p:sldId id="256" r:id="rId2"/>
+    <p:sldId id="257" r:id="rId3"/>
+    <p:sldId id="258" r:id="rId4"/>
+    <p:sldId id="259" r:id="rId5"/>
+    <p:sldId id="260" r:id="rId6"/>
+    <p:sldId id="261" r:id="rId7"/>
+    <p:sldId id="262" r:id="rId8"/>
+    <p:sldId id="263" r:id="rId9"/>
+    <p:sldId id="264" r:id="rId10"/>
+    <p:sldId id="265" r:id="rId11"/>
+    <p:sldId id="266" r:id="rId12"/>
+    <p:sldId id="267" r:id="rId13"/>
+    <p:sldId id="268" r:id="rId14"/>
+    <p:sldId id="269" r:id="rId15"/>
   </p:sldIdLst>
-  <p:sldSz cx="9144000" cy="5148072" type="screen4x3"/>
+  <p:sldSz cx="9144000" cy="5148263"/>
   <p:notesSz cx="6858000" cy="9144000"/>
   <p:defaultTextStyle>
     <a:defPPr>
@@ -117,6 +117,22 @@
       </a:defRPr>
     </a:lvl9pPr>
   </p:defaultTextStyle>
+  <p:extLst>
+    <p:ext uri="{EFAFB233-063F-42B5-8137-9DF3F51BA10A}">
+      <p15:sldGuideLst xmlns:p15="http://schemas.microsoft.com/office/powerpoint/2012/main">
+        <p15:guide id="1" orient="horz" pos="2160">
+          <p15:clr>
+            <a:srgbClr val="A4A3A4"/>
+          </p15:clr>
+        </p15:guide>
+        <p15:guide id="2" pos="2880">
+          <p15:clr>
+            <a:srgbClr val="A4A3A4"/>
+          </p15:clr>
+        </p15:guide>
+      </p15:sldGuideLst>
+    </p:ext>
+  </p:extLst>
 </p:presentation>
 </file>
 
@@ -158,10 +174,9 @@
           <a:lstStyle/>
           <a:p>
             <a:r>
-              <a:rPr lang="en-US" smtClean="0"/>
+              <a:rPr lang="en-US"/>
               <a:t>Click to edit Master title style</a:t>
             </a:r>
-            <a:endParaRPr lang="en-US"/>
           </a:p>
         </p:txBody>
       </p:sp>
@@ -277,10 +292,9 @@
           </a:lstStyle>
           <a:p>
             <a:r>
-              <a:rPr lang="en-US" smtClean="0"/>
+              <a:rPr lang="en-US"/>
               <a:t>Click to edit Master subtitle style</a:t>
             </a:r>
-            <a:endParaRPr lang="en-US"/>
           </a:p>
         </p:txBody>
       </p:sp>
@@ -301,7 +315,7 @@
           <a:p>
             <a:fld id="{5BCAD085-E8A6-8845-BD4E-CB4CCA059FC4}" type="datetimeFigureOut">
               <a:rPr lang="en-US" smtClean="0"/>
-              <a:t>1/27/13</a:t>
+              <a:t>5/9/26</a:t>
             </a:fld>
             <a:endParaRPr lang="en-US"/>
           </a:p>
@@ -395,10 +409,9 @@
           <a:lstStyle/>
           <a:p>
             <a:r>
-              <a:rPr lang="en-US" smtClean="0"/>
+              <a:rPr lang="en-US"/>
               <a:t>Click to edit Master title style</a:t>
             </a:r>
-            <a:endParaRPr lang="en-US"/>
           </a:p>
         </p:txBody>
       </p:sp>
@@ -419,38 +432,37 @@
           <a:p>
             <a:pPr lvl="0"/>
             <a:r>
-              <a:rPr lang="en-US" smtClean="0"/>
+              <a:rPr lang="en-US"/>
               <a:t>Click to edit Master text styles</a:t>
             </a:r>
           </a:p>
           <a:p>
             <a:pPr lvl="1"/>
             <a:r>
-              <a:rPr lang="en-US" smtClean="0"/>
+              <a:rPr lang="en-US"/>
               <a:t>Second level</a:t>
             </a:r>
           </a:p>
           <a:p>
             <a:pPr lvl="2"/>
             <a:r>
-              <a:rPr lang="en-US" smtClean="0"/>
+              <a:rPr lang="en-US"/>
               <a:t>Third level</a:t>
             </a:r>
           </a:p>
           <a:p>
             <a:pPr lvl="3"/>
             <a:r>
-              <a:rPr lang="en-US" smtClean="0"/>
+              <a:rPr lang="en-US"/>
               <a:t>Fourth level</a:t>
             </a:r>
           </a:p>
           <a:p>
             <a:pPr lvl="4"/>
             <a:r>
-              <a:rPr lang="en-US" smtClean="0"/>
+              <a:rPr lang="en-US"/>
               <a:t>Fifth level</a:t>
             </a:r>
-            <a:endParaRPr lang="en-US"/>
           </a:p>
         </p:txBody>
       </p:sp>
@@ -471,7 +483,7 @@
           <a:p>
             <a:fld id="{5BCAD085-E8A6-8845-BD4E-CB4CCA059FC4}" type="datetimeFigureOut">
               <a:rPr lang="en-US" smtClean="0"/>
-              <a:t>1/27/13</a:t>
+              <a:t>5/9/26</a:t>
             </a:fld>
             <a:endParaRPr lang="en-US"/>
           </a:p>
@@ -570,10 +582,9 @@
           <a:lstStyle/>
           <a:p>
             <a:r>
-              <a:rPr lang="en-US" smtClean="0"/>
+              <a:rPr lang="en-US"/>
               <a:t>Click to edit Master title style</a:t>
             </a:r>
-            <a:endParaRPr lang="en-US"/>
           </a:p>
         </p:txBody>
       </p:sp>
@@ -599,38 +610,37 @@
           <a:p>
             <a:pPr lvl="0"/>
             <a:r>
-              <a:rPr lang="en-US" smtClean="0"/>
+              <a:rPr lang="en-US"/>
               <a:t>Click to edit Master text styles</a:t>
             </a:r>
           </a:p>
           <a:p>
             <a:pPr lvl="1"/>
             <a:r>
-              <a:rPr lang="en-US" smtClean="0"/>
+              <a:rPr lang="en-US"/>
               <a:t>Second level</a:t>
             </a:r>
           </a:p>
           <a:p>
             <a:pPr lvl="2"/>
             <a:r>
-              <a:rPr lang="en-US" smtClean="0"/>
+              <a:rPr lang="en-US"/>
               <a:t>Third level</a:t>
             </a:r>
           </a:p>
           <a:p>
             <a:pPr lvl="3"/>
             <a:r>
-              <a:rPr lang="en-US" smtClean="0"/>
+              <a:rPr lang="en-US"/>
               <a:t>Fourth level</a:t>
             </a:r>
           </a:p>
           <a:p>
             <a:pPr lvl="4"/>
             <a:r>
-              <a:rPr lang="en-US" smtClean="0"/>
+              <a:rPr lang="en-US"/>
               <a:t>Fifth level</a:t>
             </a:r>
-            <a:endParaRPr lang="en-US"/>
           </a:p>
         </p:txBody>
       </p:sp>
@@ -651,7 +661,7 @@
           <a:p>
             <a:fld id="{5BCAD085-E8A6-8845-BD4E-CB4CCA059FC4}" type="datetimeFigureOut">
               <a:rPr lang="en-US" smtClean="0"/>
-              <a:t>1/27/13</a:t>
+              <a:t>5/9/26</a:t>
             </a:fld>
             <a:endParaRPr lang="en-US"/>
           </a:p>
@@ -745,10 +755,9 @@
           <a:lstStyle/>
           <a:p>
             <a:r>
-              <a:rPr lang="en-US" smtClean="0"/>
+              <a:rPr lang="en-US"/>
               <a:t>Click to edit Master title style</a:t>
             </a:r>
-            <a:endParaRPr lang="en-US"/>
           </a:p>
         </p:txBody>
       </p:sp>
@@ -769,38 +778,37 @@
           <a:p>
             <a:pPr lvl="0"/>
             <a:r>
-              <a:rPr lang="en-US" smtClean="0"/>
+              <a:rPr lang="en-US"/>
               <a:t>Click to edit Master text styles</a:t>
             </a:r>
           </a:p>
           <a:p>
             <a:pPr lvl="1"/>
             <a:r>
-              <a:rPr lang="en-US" smtClean="0"/>
+              <a:rPr lang="en-US"/>
               <a:t>Second level</a:t>
             </a:r>
           </a:p>
           <a:p>
             <a:pPr lvl="2"/>
             <a:r>
-              <a:rPr lang="en-US" smtClean="0"/>
+              <a:rPr lang="en-US"/>
               <a:t>Third level</a:t>
             </a:r>
           </a:p>
           <a:p>
             <a:pPr lvl="3"/>
             <a:r>
-              <a:rPr lang="en-US" smtClean="0"/>
+              <a:rPr lang="en-US"/>
               <a:t>Fourth level</a:t>
             </a:r>
           </a:p>
           <a:p>
             <a:pPr lvl="4"/>
             <a:r>
-              <a:rPr lang="en-US" smtClean="0"/>
+              <a:rPr lang="en-US"/>
               <a:t>Fifth level</a:t>
             </a:r>
-            <a:endParaRPr lang="en-US"/>
           </a:p>
         </p:txBody>
       </p:sp>
@@ -821,7 +829,7 @@
           <a:p>
             <a:fld id="{5BCAD085-E8A6-8845-BD4E-CB4CCA059FC4}" type="datetimeFigureOut">
               <a:rPr lang="en-US" smtClean="0"/>
-              <a:t>1/27/13</a:t>
+              <a:t>5/9/26</a:t>
             </a:fld>
             <a:endParaRPr lang="en-US"/>
           </a:p>
@@ -924,10 +932,9 @@
           </a:lstStyle>
           <a:p>
             <a:r>
-              <a:rPr lang="en-US" smtClean="0"/>
+              <a:rPr lang="en-US"/>
               <a:t>Click to edit Master title style</a:t>
             </a:r>
-            <a:endParaRPr lang="en-US"/>
           </a:p>
         </p:txBody>
       </p:sp>
@@ -1044,7 +1051,7 @@
           <a:p>
             <a:pPr lvl="0"/>
             <a:r>
-              <a:rPr lang="en-US" smtClean="0"/>
+              <a:rPr lang="en-US"/>
               <a:t>Click to edit Master text styles</a:t>
             </a:r>
           </a:p>
@@ -1067,7 +1074,7 @@
           <a:p>
             <a:fld id="{5BCAD085-E8A6-8845-BD4E-CB4CCA059FC4}" type="datetimeFigureOut">
               <a:rPr lang="en-US" smtClean="0"/>
-              <a:t>1/27/13</a:t>
+              <a:t>5/9/26</a:t>
             </a:fld>
             <a:endParaRPr lang="en-US"/>
           </a:p>
@@ -1161,10 +1168,9 @@
           <a:lstStyle/>
           <a:p>
             <a:r>
-              <a:rPr lang="en-US" smtClean="0"/>
+              <a:rPr lang="en-US"/>
               <a:t>Click to edit Master title style</a:t>
             </a:r>
-            <a:endParaRPr lang="en-US"/>
           </a:p>
         </p:txBody>
       </p:sp>
@@ -1218,38 +1224,37 @@
           <a:p>
             <a:pPr lvl="0"/>
             <a:r>
-              <a:rPr lang="en-US" smtClean="0"/>
+              <a:rPr lang="en-US"/>
               <a:t>Click to edit Master text styles</a:t>
             </a:r>
           </a:p>
           <a:p>
             <a:pPr lvl="1"/>
             <a:r>
-              <a:rPr lang="en-US" smtClean="0"/>
+              <a:rPr lang="en-US"/>
               <a:t>Second level</a:t>
             </a:r>
           </a:p>
           <a:p>
             <a:pPr lvl="2"/>
             <a:r>
-              <a:rPr lang="en-US" smtClean="0"/>
+              <a:rPr lang="en-US"/>
               <a:t>Third level</a:t>
             </a:r>
           </a:p>
           <a:p>
             <a:pPr lvl="3"/>
             <a:r>
-              <a:rPr lang="en-US" smtClean="0"/>
+              <a:rPr lang="en-US"/>
               <a:t>Fourth level</a:t>
             </a:r>
           </a:p>
           <a:p>
             <a:pPr lvl="4"/>
             <a:r>
-              <a:rPr lang="en-US" smtClean="0"/>
+              <a:rPr lang="en-US"/>
               <a:t>Fifth level</a:t>
             </a:r>
-            <a:endParaRPr lang="en-US"/>
           </a:p>
         </p:txBody>
       </p:sp>
@@ -1303,38 +1308,37 @@
           <a:p>
             <a:pPr lvl="0"/>
             <a:r>
-              <a:rPr lang="en-US" smtClean="0"/>
+              <a:rPr lang="en-US"/>
               <a:t>Click to edit Master text styles</a:t>
             </a:r>
           </a:p>
           <a:p>
             <a:pPr lvl="1"/>
             <a:r>
-              <a:rPr lang="en-US" smtClean="0"/>
+              <a:rPr lang="en-US"/>
               <a:t>Second level</a:t>
             </a:r>
           </a:p>
           <a:p>
             <a:pPr lvl="2"/>
             <a:r>
-              <a:rPr lang="en-US" smtClean="0"/>
+              <a:rPr lang="en-US"/>
               <a:t>Third level</a:t>
             </a:r>
           </a:p>
           <a:p>
             <a:pPr lvl="3"/>
             <a:r>
-              <a:rPr lang="en-US" smtClean="0"/>
+              <a:rPr lang="en-US"/>
               <a:t>Fourth level</a:t>
             </a:r>
           </a:p>
           <a:p>
             <a:pPr lvl="4"/>
             <a:r>
-              <a:rPr lang="en-US" smtClean="0"/>
+              <a:rPr lang="en-US"/>
               <a:t>Fifth level</a:t>
             </a:r>
-            <a:endParaRPr lang="en-US"/>
           </a:p>
         </p:txBody>
       </p:sp>
@@ -1355,7 +1359,7 @@
           <a:p>
             <a:fld id="{5BCAD085-E8A6-8845-BD4E-CB4CCA059FC4}" type="datetimeFigureOut">
               <a:rPr lang="en-US" smtClean="0"/>
-              <a:t>1/27/13</a:t>
+              <a:t>5/9/26</a:t>
             </a:fld>
             <a:endParaRPr lang="en-US"/>
           </a:p>
@@ -1453,10 +1457,9 @@
           </a:lstStyle>
           <a:p>
             <a:r>
-              <a:rPr lang="en-US" smtClean="0"/>
+              <a:rPr lang="en-US"/>
               <a:t>Click to edit Master title style</a:t>
             </a:r>
-            <a:endParaRPr lang="en-US"/>
           </a:p>
         </p:txBody>
       </p:sp>
@@ -1519,7 +1522,7 @@
           <a:p>
             <a:pPr lvl="0"/>
             <a:r>
-              <a:rPr lang="en-US" smtClean="0"/>
+              <a:rPr lang="en-US"/>
               <a:t>Click to edit Master text styles</a:t>
             </a:r>
           </a:p>
@@ -1575,38 +1578,37 @@
           <a:p>
             <a:pPr lvl="0"/>
             <a:r>
-              <a:rPr lang="en-US" smtClean="0"/>
+              <a:rPr lang="en-US"/>
               <a:t>Click to edit Master text styles</a:t>
             </a:r>
           </a:p>
           <a:p>
             <a:pPr lvl="1"/>
             <a:r>
-              <a:rPr lang="en-US" smtClean="0"/>
+              <a:rPr lang="en-US"/>
               <a:t>Second level</a:t>
             </a:r>
           </a:p>
           <a:p>
             <a:pPr lvl="2"/>
             <a:r>
-              <a:rPr lang="en-US" smtClean="0"/>
+              <a:rPr lang="en-US"/>
               <a:t>Third level</a:t>
             </a:r>
           </a:p>
           <a:p>
             <a:pPr lvl="3"/>
             <a:r>
-              <a:rPr lang="en-US" smtClean="0"/>
+              <a:rPr lang="en-US"/>
               <a:t>Fourth level</a:t>
             </a:r>
           </a:p>
           <a:p>
             <a:pPr lvl="4"/>
             <a:r>
-              <a:rPr lang="en-US" smtClean="0"/>
+              <a:rPr lang="en-US"/>
               <a:t>Fifth level</a:t>
             </a:r>
-            <a:endParaRPr lang="en-US"/>
           </a:p>
         </p:txBody>
       </p:sp>
@@ -1669,7 +1671,7 @@
           <a:p>
             <a:pPr lvl="0"/>
             <a:r>
-              <a:rPr lang="en-US" smtClean="0"/>
+              <a:rPr lang="en-US"/>
               <a:t>Click to edit Master text styles</a:t>
             </a:r>
           </a:p>
@@ -1725,38 +1727,37 @@
           <a:p>
             <a:pPr lvl="0"/>
             <a:r>
-              <a:rPr lang="en-US" smtClean="0"/>
+              <a:rPr lang="en-US"/>
               <a:t>Click to edit Master text styles</a:t>
             </a:r>
           </a:p>
           <a:p>
             <a:pPr lvl="1"/>
             <a:r>
-              <a:rPr lang="en-US" smtClean="0"/>
+              <a:rPr lang="en-US"/>
               <a:t>Second level</a:t>
             </a:r>
           </a:p>
           <a:p>
             <a:pPr lvl="2"/>
             <a:r>
-              <a:rPr lang="en-US" smtClean="0"/>
+              <a:rPr lang="en-US"/>
               <a:t>Third level</a:t>
             </a:r>
           </a:p>
           <a:p>
             <a:pPr lvl="3"/>
             <a:r>
-              <a:rPr lang="en-US" smtClean="0"/>
+              <a:rPr lang="en-US"/>
               <a:t>Fourth level</a:t>
             </a:r>
           </a:p>
           <a:p>
             <a:pPr lvl="4"/>
             <a:r>
-              <a:rPr lang="en-US" smtClean="0"/>
+              <a:rPr lang="en-US"/>
               <a:t>Fifth level</a:t>
             </a:r>
-            <a:endParaRPr lang="en-US"/>
           </a:p>
         </p:txBody>
       </p:sp>
@@ -1777,7 +1778,7 @@
           <a:p>
             <a:fld id="{5BCAD085-E8A6-8845-BD4E-CB4CCA059FC4}" type="datetimeFigureOut">
               <a:rPr lang="en-US" smtClean="0"/>
-              <a:t>1/27/13</a:t>
+              <a:t>5/9/26</a:t>
             </a:fld>
             <a:endParaRPr lang="en-US"/>
           </a:p>
@@ -1871,10 +1872,9 @@
           <a:lstStyle/>
           <a:p>
             <a:r>
-              <a:rPr lang="en-US" smtClean="0"/>
+              <a:rPr lang="en-US"/>
               <a:t>Click to edit Master title style</a:t>
             </a:r>
-            <a:endParaRPr lang="en-US"/>
           </a:p>
         </p:txBody>
       </p:sp>
@@ -1895,7 +1895,7 @@
           <a:p>
             <a:fld id="{5BCAD085-E8A6-8845-BD4E-CB4CCA059FC4}" type="datetimeFigureOut">
               <a:rPr lang="en-US" smtClean="0"/>
-              <a:t>1/27/13</a:t>
+              <a:t>5/9/26</a:t>
             </a:fld>
             <a:endParaRPr lang="en-US"/>
           </a:p>
@@ -1990,7 +1990,7 @@
           <a:p>
             <a:fld id="{5BCAD085-E8A6-8845-BD4E-CB4CCA059FC4}" type="datetimeFigureOut">
               <a:rPr lang="en-US" smtClean="0"/>
-              <a:t>1/27/13</a:t>
+              <a:t>5/9/26</a:t>
             </a:fld>
             <a:endParaRPr lang="en-US"/>
           </a:p>
@@ -2093,10 +2093,9 @@
           </a:lstStyle>
           <a:p>
             <a:r>
-              <a:rPr lang="en-US" smtClean="0"/>
+              <a:rPr lang="en-US"/>
               <a:t>Click to edit Master title style</a:t>
             </a:r>
-            <a:endParaRPr lang="en-US"/>
           </a:p>
         </p:txBody>
       </p:sp>
@@ -2150,38 +2149,37 @@
           <a:p>
             <a:pPr lvl="0"/>
             <a:r>
-              <a:rPr lang="en-US" smtClean="0"/>
+              <a:rPr lang="en-US"/>
               <a:t>Click to edit Master text styles</a:t>
             </a:r>
           </a:p>
           <a:p>
             <a:pPr lvl="1"/>
             <a:r>
-              <a:rPr lang="en-US" smtClean="0"/>
+              <a:rPr lang="en-US"/>
               <a:t>Second level</a:t>
             </a:r>
           </a:p>
           <a:p>
             <a:pPr lvl="2"/>
             <a:r>
-              <a:rPr lang="en-US" smtClean="0"/>
+              <a:rPr lang="en-US"/>
               <a:t>Third level</a:t>
             </a:r>
           </a:p>
           <a:p>
             <a:pPr lvl="3"/>
             <a:r>
-              <a:rPr lang="en-US" smtClean="0"/>
+              <a:rPr lang="en-US"/>
               <a:t>Fourth level</a:t>
             </a:r>
           </a:p>
           <a:p>
             <a:pPr lvl="4"/>
             <a:r>
-              <a:rPr lang="en-US" smtClean="0"/>
+              <a:rPr lang="en-US"/>
               <a:t>Fifth level</a:t>
             </a:r>
-            <a:endParaRPr lang="en-US"/>
           </a:p>
         </p:txBody>
       </p:sp>
@@ -2244,7 +2242,7 @@
           <a:p>
             <a:pPr lvl="0"/>
             <a:r>
-              <a:rPr lang="en-US" smtClean="0"/>
+              <a:rPr lang="en-US"/>
               <a:t>Click to edit Master text styles</a:t>
             </a:r>
           </a:p>
@@ -2267,7 +2265,7 @@
           <a:p>
             <a:fld id="{5BCAD085-E8A6-8845-BD4E-CB4CCA059FC4}" type="datetimeFigureOut">
               <a:rPr lang="en-US" smtClean="0"/>
-              <a:t>1/27/13</a:t>
+              <a:t>5/9/26</a:t>
             </a:fld>
             <a:endParaRPr lang="en-US"/>
           </a:p>
@@ -2370,10 +2368,9 @@
           </a:lstStyle>
           <a:p>
             <a:r>
-              <a:rPr lang="en-US" smtClean="0"/>
+              <a:rPr lang="en-US"/>
               <a:t>Click to edit Master title style</a:t>
             </a:r>
-            <a:endParaRPr lang="en-US"/>
           </a:p>
         </p:txBody>
       </p:sp>
@@ -2497,7 +2494,7 @@
           <a:p>
             <a:pPr lvl="0"/>
             <a:r>
-              <a:rPr lang="en-US" smtClean="0"/>
+              <a:rPr lang="en-US"/>
               <a:t>Click to edit Master text styles</a:t>
             </a:r>
           </a:p>
@@ -2520,7 +2517,7 @@
           <a:p>
             <a:fld id="{5BCAD085-E8A6-8845-BD4E-CB4CCA059FC4}" type="datetimeFigureOut">
               <a:rPr lang="en-US" smtClean="0"/>
-              <a:t>1/27/13</a:t>
+              <a:t>5/9/26</a:t>
             </a:fld>
             <a:endParaRPr lang="en-US"/>
           </a:p>
@@ -2629,10 +2626,9 @@
           <a:lstStyle/>
           <a:p>
             <a:r>
-              <a:rPr lang="en-US" smtClean="0"/>
+              <a:rPr lang="en-US"/>
               <a:t>Click to edit Master title style</a:t>
             </a:r>
-            <a:endParaRPr lang="en-US"/>
           </a:p>
         </p:txBody>
       </p:sp>
@@ -2663,38 +2659,37 @@
           <a:p>
             <a:pPr lvl="0"/>
             <a:r>
-              <a:rPr lang="en-US" smtClean="0"/>
+              <a:rPr lang="en-US"/>
               <a:t>Click to edit Master text styles</a:t>
             </a:r>
           </a:p>
           <a:p>
             <a:pPr lvl="1"/>
             <a:r>
-              <a:rPr lang="en-US" smtClean="0"/>
+              <a:rPr lang="en-US"/>
               <a:t>Second level</a:t>
             </a:r>
           </a:p>
           <a:p>
             <a:pPr lvl="2"/>
             <a:r>
-              <a:rPr lang="en-US" smtClean="0"/>
+              <a:rPr lang="en-US"/>
               <a:t>Third level</a:t>
             </a:r>
           </a:p>
           <a:p>
             <a:pPr lvl="3"/>
             <a:r>
-              <a:rPr lang="en-US" smtClean="0"/>
+              <a:rPr lang="en-US"/>
               <a:t>Fourth level</a:t>
             </a:r>
           </a:p>
           <a:p>
             <a:pPr lvl="4"/>
             <a:r>
-              <a:rPr lang="en-US" smtClean="0"/>
+              <a:rPr lang="en-US"/>
               <a:t>Fifth level</a:t>
             </a:r>
-            <a:endParaRPr lang="en-US"/>
           </a:p>
         </p:txBody>
       </p:sp>
@@ -2733,7 +2728,7 @@
           <a:p>
             <a:fld id="{5BCAD085-E8A6-8845-BD4E-CB4CCA059FC4}" type="datetimeFigureOut">
               <a:rPr lang="en-US" smtClean="0"/>
-              <a:t>1/27/13</a:t>
+              <a:t>5/9/26</a:t>
             </a:fld>
             <a:endParaRPr lang="en-US"/>
           </a:p>
@@ -3092,7 +3087,7 @@
 </file>
 
 <file path=ppt/slides/slide1.xml><?xml version="1.0" encoding="utf-8"?>
-<p:sld xmlns:a="http://schemas.openxmlformats.org/drawingml/2006/main" xmlns:p="http://schemas.openxmlformats.org/presentationml/2006/main" xmlns:r="http://schemas.openxmlformats.org/officeDocument/2006/relationships">
+<p:sld xmlns:a="http://schemas.openxmlformats.org/drawingml/2006/main" xmlns:r="http://schemas.openxmlformats.org/officeDocument/2006/relationships" xmlns:p="http://schemas.openxmlformats.org/presentationml/2006/main">
   <p:cSld>
     <p:bg>
       <p:bgPr>
@@ -3108,7 +3103,14 @@
         <p:cNvGrpSpPr/>
         <p:nvPr/>
       </p:nvGrpSpPr>
-      <p:grpSpPr/>
+      <p:grpSpPr>
+        <a:xfrm>
+          <a:off x="0" y="0"/>
+          <a:ext cx="0" cy="0"/>
+          <a:chOff x="0" y="0"/>
+          <a:chExt cx="0" cy="0"/>
+        </a:xfrm>
+      </p:grpSpPr>
       <p:sp>
         <p:nvSpPr>
           <p:cNvPr id="2" name="Rectangle 1"/>
@@ -3149,6 +3151,7 @@
           <a:lstStyle/>
           <a:p>
             <a:pPr algn="ctr"/>
+            <a:endParaRPr/>
           </a:p>
         </p:txBody>
       </p:sp>
@@ -3242,6 +3245,7 @@
           <a:lstStyle/>
           <a:p>
             <a:pPr algn="ctr"/>
+            <a:endParaRPr/>
           </a:p>
         </p:txBody>
       </p:sp>
@@ -3254,28 +3258,28 @@
         <p:spPr>
           <a:xfrm>
             <a:off x="320040" y="3063240"/>
-            <a:ext cx="6400800" cy="411480"/>
-          </a:xfrm>
-          <a:prstGeom prst="rect">
-            <a:avLst/>
-          </a:prstGeom>
-          <a:noFill/>
-        </p:spPr>
-        <p:txBody>
-          <a:bodyPr wrap="square">
-            <a:spAutoFit/>
-          </a:bodyPr>
-          <a:lstStyle/>
-          <a:p>
-            <a:pPr algn="l"/>
-            <a:r>
-              <a:rPr sz="1800" b="0">
+            <a:ext cx="6400800" cy="369332"/>
+          </a:xfrm>
+          <a:prstGeom prst="rect">
+            <a:avLst/>
+          </a:prstGeom>
+          <a:noFill/>
+        </p:spPr>
+        <p:txBody>
+          <a:bodyPr wrap="square">
+            <a:spAutoFit/>
+          </a:bodyPr>
+          <a:lstStyle/>
+          <a:p>
+            <a:pPr algn="l"/>
+            <a:r>
+              <a:rPr sz="1800" b="0" dirty="0">
                 <a:solidFill>
                   <a:srgbClr val="9AA0A6"/>
                 </a:solidFill>
                 <a:latin typeface="Arial"/>
               </a:rPr>
-              <a:t>Matteo Gazzurelli · MaGa Srl</a:t>
+              <a:t>Matteo Gazzurelli</a:t>
             </a:r>
           </a:p>
         </p:txBody>
@@ -3304,7 +3308,7 @@
           <a:p>
             <a:pPr algn="l"/>
             <a:r>
-              <a:rPr sz="1600" b="0">
+              <a:rPr sz="1600" b="0" dirty="0">
                 <a:solidFill>
                   <a:srgbClr val="9AA0A6"/>
                 </a:solidFill>
@@ -3324,7 +3328,7 @@
 </file>
 
 <file path=ppt/slides/slide10.xml><?xml version="1.0" encoding="utf-8"?>
-<p:sld xmlns:a="http://schemas.openxmlformats.org/drawingml/2006/main" xmlns:p="http://schemas.openxmlformats.org/presentationml/2006/main" xmlns:r="http://schemas.openxmlformats.org/officeDocument/2006/relationships">
+<p:sld xmlns:a="http://schemas.openxmlformats.org/drawingml/2006/main" xmlns:r="http://schemas.openxmlformats.org/officeDocument/2006/relationships" xmlns:p="http://schemas.openxmlformats.org/presentationml/2006/main">
   <p:cSld>
     <p:bg>
       <p:bgPr>
@@ -3340,7 +3344,14 @@
         <p:cNvGrpSpPr/>
         <p:nvPr/>
       </p:nvGrpSpPr>
-      <p:grpSpPr/>
+      <p:grpSpPr>
+        <a:xfrm>
+          <a:off x="0" y="0"/>
+          <a:ext cx="0" cy="0"/>
+          <a:chOff x="0" y="0"/>
+          <a:chExt cx="0" cy="0"/>
+        </a:xfrm>
+      </p:grpSpPr>
       <p:sp>
         <p:nvSpPr>
           <p:cNvPr id="2" name="Rectangle 1"/>
@@ -3381,6 +3392,7 @@
           <a:lstStyle/>
           <a:p>
             <a:pPr algn="ctr"/>
+            <a:endParaRPr/>
           </a:p>
         </p:txBody>
       </p:sp>
@@ -3495,6 +3507,7 @@
           <a:lstStyle/>
           <a:p>
             <a:pPr algn="ctr"/>
+            <a:endParaRPr/>
           </a:p>
         </p:txBody>
       </p:sp>
@@ -3575,6 +3588,7 @@
           <a:lstStyle/>
           <a:p>
             <a:pPr algn="ctr"/>
+            <a:endParaRPr/>
           </a:p>
         </p:txBody>
       </p:sp>
@@ -3725,6 +3739,7 @@
           <a:lstStyle/>
           <a:p>
             <a:pPr algn="ctr"/>
+            <a:endParaRPr/>
           </a:p>
         </p:txBody>
       </p:sp>
@@ -3805,6 +3820,7 @@
           <a:lstStyle/>
           <a:p>
             <a:pPr algn="ctr"/>
+            <a:endParaRPr/>
           </a:p>
         </p:txBody>
       </p:sp>
@@ -3955,6 +3971,7 @@
           <a:lstStyle/>
           <a:p>
             <a:pPr algn="ctr"/>
+            <a:endParaRPr/>
           </a:p>
         </p:txBody>
       </p:sp>
@@ -4035,6 +4052,7 @@
           <a:lstStyle/>
           <a:p>
             <a:pPr algn="ctr"/>
+            <a:endParaRPr/>
           </a:p>
         </p:txBody>
       </p:sp>
@@ -4187,7 +4205,7 @@
 </file>
 
 <file path=ppt/slides/slide11.xml><?xml version="1.0" encoding="utf-8"?>
-<p:sld xmlns:a="http://schemas.openxmlformats.org/drawingml/2006/main" xmlns:p="http://schemas.openxmlformats.org/presentationml/2006/main" xmlns:r="http://schemas.openxmlformats.org/officeDocument/2006/relationships">
+<p:sld xmlns:a="http://schemas.openxmlformats.org/drawingml/2006/main" xmlns:r="http://schemas.openxmlformats.org/officeDocument/2006/relationships" xmlns:p="http://schemas.openxmlformats.org/presentationml/2006/main">
   <p:cSld>
     <p:bg>
       <p:bgPr>
@@ -4203,7 +4221,14 @@
         <p:cNvGrpSpPr/>
         <p:nvPr/>
       </p:nvGrpSpPr>
-      <p:grpSpPr/>
+      <p:grpSpPr>
+        <a:xfrm>
+          <a:off x="0" y="0"/>
+          <a:ext cx="0" cy="0"/>
+          <a:chOff x="0" y="0"/>
+          <a:chExt cx="0" cy="0"/>
+        </a:xfrm>
+      </p:grpSpPr>
       <p:sp>
         <p:nvSpPr>
           <p:cNvPr id="2" name="Rectangle 1"/>
@@ -4244,6 +4269,7 @@
           <a:lstStyle/>
           <a:p>
             <a:pPr algn="ctr"/>
+            <a:endParaRPr/>
           </a:p>
         </p:txBody>
       </p:sp>
@@ -4393,6 +4419,7 @@
           <a:lstStyle/>
           <a:p>
             <a:pPr algn="ctr"/>
+            <a:endParaRPr/>
           </a:p>
         </p:txBody>
       </p:sp>
@@ -4436,6 +4463,7 @@
           <a:lstStyle/>
           <a:p>
             <a:pPr algn="ctr"/>
+            <a:endParaRPr/>
           </a:p>
         </p:txBody>
       </p:sp>
@@ -4551,6 +4579,7 @@
           <a:lstStyle/>
           <a:p>
             <a:pPr algn="ctr"/>
+            <a:endParaRPr/>
           </a:p>
         </p:txBody>
       </p:sp>
@@ -4594,6 +4623,7 @@
           <a:lstStyle/>
           <a:p>
             <a:pPr algn="ctr"/>
+            <a:endParaRPr/>
           </a:p>
         </p:txBody>
       </p:sp>
@@ -4709,6 +4739,7 @@
           <a:lstStyle/>
           <a:p>
             <a:pPr algn="ctr"/>
+            <a:endParaRPr/>
           </a:p>
         </p:txBody>
       </p:sp>
@@ -4752,6 +4783,7 @@
           <a:lstStyle/>
           <a:p>
             <a:pPr algn="ctr"/>
+            <a:endParaRPr/>
           </a:p>
         </p:txBody>
       </p:sp>
@@ -4869,7 +4901,7 @@
 </file>
 
 <file path=ppt/slides/slide12.xml><?xml version="1.0" encoding="utf-8"?>
-<p:sld xmlns:a="http://schemas.openxmlformats.org/drawingml/2006/main" xmlns:p="http://schemas.openxmlformats.org/presentationml/2006/main" xmlns:r="http://schemas.openxmlformats.org/officeDocument/2006/relationships">
+<p:sld xmlns:a="http://schemas.openxmlformats.org/drawingml/2006/main" xmlns:r="http://schemas.openxmlformats.org/officeDocument/2006/relationships" xmlns:p="http://schemas.openxmlformats.org/presentationml/2006/main">
   <p:cSld>
     <p:bg>
       <p:bgPr>
@@ -4885,7 +4917,14 @@
         <p:cNvGrpSpPr/>
         <p:nvPr/>
       </p:nvGrpSpPr>
-      <p:grpSpPr/>
+      <p:grpSpPr>
+        <a:xfrm>
+          <a:off x="0" y="0"/>
+          <a:ext cx="0" cy="0"/>
+          <a:chOff x="0" y="0"/>
+          <a:chExt cx="0" cy="0"/>
+        </a:xfrm>
+      </p:grpSpPr>
       <p:sp>
         <p:nvSpPr>
           <p:cNvPr id="2" name="Rectangle 1"/>
@@ -4926,6 +4965,7 @@
           <a:lstStyle/>
           <a:p>
             <a:pPr algn="ctr"/>
+            <a:endParaRPr/>
           </a:p>
         </p:txBody>
       </p:sp>
@@ -5143,6 +5183,7 @@
           <a:lstStyle/>
           <a:p>
             <a:pPr algn="ctr"/>
+            <a:endParaRPr/>
           </a:p>
         </p:txBody>
       </p:sp>
@@ -5291,6 +5332,7 @@
           <a:lstStyle/>
           <a:p>
             <a:pPr algn="ctr"/>
+            <a:endParaRPr/>
           </a:p>
         </p:txBody>
       </p:sp>
@@ -5439,6 +5481,7 @@
           <a:lstStyle/>
           <a:p>
             <a:pPr algn="ctr"/>
+            <a:endParaRPr/>
           </a:p>
         </p:txBody>
       </p:sp>
@@ -5587,6 +5630,7 @@
           <a:lstStyle/>
           <a:p>
             <a:pPr algn="ctr"/>
+            <a:endParaRPr/>
           </a:p>
         </p:txBody>
       </p:sp>
@@ -5735,6 +5779,7 @@
           <a:lstStyle/>
           <a:p>
             <a:pPr algn="ctr"/>
+            <a:endParaRPr/>
           </a:p>
         </p:txBody>
       </p:sp>
@@ -5782,7 +5827,7 @@
 </file>
 
 <file path=ppt/slides/slide13.xml><?xml version="1.0" encoding="utf-8"?>
-<p:sld xmlns:a="http://schemas.openxmlformats.org/drawingml/2006/main" xmlns:p="http://schemas.openxmlformats.org/presentationml/2006/main" xmlns:r="http://schemas.openxmlformats.org/officeDocument/2006/relationships">
+<p:sld xmlns:a="http://schemas.openxmlformats.org/drawingml/2006/main" xmlns:r="http://schemas.openxmlformats.org/officeDocument/2006/relationships" xmlns:p="http://schemas.openxmlformats.org/presentationml/2006/main">
   <p:cSld>
     <p:bg>
       <p:bgPr>
@@ -5798,7 +5843,14 @@
         <p:cNvGrpSpPr/>
         <p:nvPr/>
       </p:nvGrpSpPr>
-      <p:grpSpPr/>
+      <p:grpSpPr>
+        <a:xfrm>
+          <a:off x="0" y="0"/>
+          <a:ext cx="0" cy="0"/>
+          <a:chOff x="0" y="0"/>
+          <a:chExt cx="0" cy="0"/>
+        </a:xfrm>
+      </p:grpSpPr>
       <p:sp>
         <p:nvSpPr>
           <p:cNvPr id="2" name="Rectangle 1"/>
@@ -5839,6 +5891,7 @@
           <a:lstStyle/>
           <a:p>
             <a:pPr algn="ctr"/>
+            <a:endParaRPr/>
           </a:p>
         </p:txBody>
       </p:sp>
@@ -6112,14 +6165,50 @@
           <a:p>
             <a:pPr algn="l"/>
             <a:r>
+              <a:rPr sz="1300" b="0" dirty="0">
+                <a:solidFill>
+                  <a:srgbClr val="FFFFFF"/>
+                </a:solidFill>
+                <a:latin typeface="Arial"/>
+              </a:rPr>
+              <a:t>Google Cloud Skills Boost: </a:t>
+            </a:r>
+            <a:r>
+              <a:rPr sz="1300" b="0" dirty="0" err="1">
+                <a:solidFill>
+                  <a:srgbClr val="FFFFFF"/>
+                </a:solidFill>
+                <a:latin typeface="Arial"/>
+              </a:rPr>
+              <a:t>cloudskillsboost.google</a:t>
+            </a:r>
+            <a:r>
+              <a:rPr sz="1300" b="0" dirty="0">
+                <a:solidFill>
+                  <a:srgbClr val="FFFFFF"/>
+                </a:solidFill>
+                <a:latin typeface="Arial"/>
+              </a:rPr>
+              <a:t>
+</a:t>
+            </a:r>
+            <a:r>
+              <a:rPr sz="1300" b="0" dirty="0" err="1">
+                <a:solidFill>
+                  <a:srgbClr val="FFFFFF"/>
+                </a:solidFill>
+                <a:latin typeface="Arial"/>
+              </a:rPr>
+              <a:t>Percorso</a:t>
+            </a:r>
+            <a:r>
               <a:rPr sz="1300" b="0">
                 <a:solidFill>
                   <a:srgbClr val="FFFFFF"/>
                 </a:solidFill>
                 <a:latin typeface="Arial"/>
               </a:rPr>
-              <a:t>Google Cloud Skills Boost: cloudskillsboost.google
-Percorso: Developing AI Agents with ADK</a:t>
+              <a:t>: Developing AI Agents with ADK</a:t>
             </a:r>
           </a:p>
         </p:txBody>
@@ -6166,6 +6255,7 @@
           <a:lstStyle/>
           <a:p>
             <a:pPr algn="ctr"/>
+            <a:endParaRPr/>
           </a:p>
         </p:txBody>
       </p:sp>
@@ -6458,7 +6548,7 @@
         <p:spPr>
           <a:xfrm>
             <a:off x="457200" y="4672584"/>
-            <a:ext cx="8229600" cy="384048"/>
+            <a:ext cx="8229600" cy="307777"/>
           </a:xfrm>
           <a:prstGeom prst="rect">
             <a:avLst/>
@@ -6473,14 +6563,74 @@
           <a:p>
             <a:pPr algn="ctr"/>
             <a:r>
-              <a:rPr sz="1400" b="0">
+              <a:rPr sz="1400" b="0" dirty="0">
                 <a:solidFill>
                   <a:srgbClr val="9AA0A6"/>
                 </a:solidFill>
                 <a:latin typeface="Arial"/>
               </a:rPr>
-              <a:t>📧  matteo@duckma.com  ·  duckma.com</a:t>
-            </a:r>
+              <a:t>📧  </a:t>
+            </a:r>
+            <a:r>
+              <a:rPr sz="1400" b="0" dirty="0" err="1">
+                <a:solidFill>
+                  <a:srgbClr val="9AA0A6"/>
+                </a:solidFill>
+                <a:latin typeface="Arial"/>
+              </a:rPr>
+              <a:t>matteo@</a:t>
+            </a:r>
+            <a:r>
+              <a:rPr lang="en-US" sz="1400" b="0" dirty="0" err="1">
+                <a:solidFill>
+                  <a:srgbClr val="9AA0A6"/>
+                </a:solidFill>
+                <a:latin typeface="Arial"/>
+              </a:rPr>
+              <a:t>gazzurelli</a:t>
+            </a:r>
+            <a:r>
+              <a:rPr sz="1400" b="0" dirty="0" err="1">
+                <a:solidFill>
+                  <a:srgbClr val="9AA0A6"/>
+                </a:solidFill>
+                <a:latin typeface="Arial"/>
+              </a:rPr>
+              <a:t>.com</a:t>
+            </a:r>
+            <a:r>
+              <a:rPr sz="1400" b="0" dirty="0">
+                <a:solidFill>
+                  <a:srgbClr val="9AA0A6"/>
+                </a:solidFill>
+                <a:latin typeface="Arial"/>
+              </a:rPr>
+              <a:t>  ·  </a:t>
+            </a:r>
+            <a:r>
+              <a:rPr lang="en-US" sz="1400" b="0" dirty="0" err="1">
+                <a:solidFill>
+                  <a:srgbClr val="9AA0A6"/>
+                </a:solidFill>
+                <a:latin typeface="Arial"/>
+              </a:rPr>
+              <a:t>matteo@gazzurelli</a:t>
+            </a:r>
+            <a:r>
+              <a:rPr sz="1400" b="0" dirty="0" err="1">
+                <a:solidFill>
+                  <a:srgbClr val="9AA0A6"/>
+                </a:solidFill>
+                <a:latin typeface="Arial"/>
+              </a:rPr>
+              <a:t>.com</a:t>
+            </a:r>
+            <a:endParaRPr sz="1400" b="0" dirty="0">
+              <a:solidFill>
+                <a:srgbClr val="9AA0A6"/>
+              </a:solidFill>
+              <a:latin typeface="Arial"/>
+            </a:endParaRPr>
           </a:p>
         </p:txBody>
       </p:sp>
@@ -6493,7 +6643,7 @@
 </file>
 
 <file path=ppt/slides/slide14.xml><?xml version="1.0" encoding="utf-8"?>
-<p:sld xmlns:a="http://schemas.openxmlformats.org/drawingml/2006/main" xmlns:p="http://schemas.openxmlformats.org/presentationml/2006/main" xmlns:r="http://schemas.openxmlformats.org/officeDocument/2006/relationships">
+<p:sld xmlns:a="http://schemas.openxmlformats.org/drawingml/2006/main" xmlns:r="http://schemas.openxmlformats.org/officeDocument/2006/relationships" xmlns:p="http://schemas.openxmlformats.org/presentationml/2006/main">
   <p:cSld>
     <p:bg>
       <p:bgPr>
@@ -6509,7 +6659,14 @@
         <p:cNvGrpSpPr/>
         <p:nvPr/>
       </p:nvGrpSpPr>
-      <p:grpSpPr/>
+      <p:grpSpPr>
+        <a:xfrm>
+          <a:off x="0" y="0"/>
+          <a:ext cx="0" cy="0"/>
+          <a:chOff x="0" y="0"/>
+          <a:chExt cx="0" cy="0"/>
+        </a:xfrm>
+      </p:grpSpPr>
       <p:sp>
         <p:nvSpPr>
           <p:cNvPr id="2" name="Rectangle 1"/>
@@ -6550,6 +6707,7 @@
           <a:lstStyle/>
           <a:p>
             <a:pPr algn="ctr"/>
+            <a:endParaRPr/>
           </a:p>
         </p:txBody>
       </p:sp>
@@ -6664,6 +6822,7 @@
           <a:lstStyle/>
           <a:p>
             <a:pPr algn="ctr"/>
+            <a:endParaRPr/>
           </a:p>
         </p:txBody>
       </p:sp>
@@ -6726,13 +6885,85 @@
           <a:p>
             <a:pPr algn="ctr"/>
             <a:r>
-              <a:rPr sz="1600" b="0">
+              <a:rPr sz="1600" b="0" dirty="0">
                 <a:solidFill>
                   <a:srgbClr val="9AA0A6"/>
                 </a:solidFill>
                 <a:latin typeface="Arial"/>
               </a:rPr>
-              <a:t>@Gazzumatteo  ·  github.com/Gazzumatteo/adk-meetup</a:t>
+              <a:t>@</a:t>
+            </a:r>
+            <a:r>
+              <a:rPr sz="1600" b="0" dirty="0" err="1">
+                <a:solidFill>
+                  <a:srgbClr val="9AA0A6"/>
+                </a:solidFill>
+                <a:latin typeface="Arial"/>
+              </a:rPr>
+              <a:t>Gazzumatteo</a:t>
+            </a:r>
+            <a:r>
+              <a:rPr sz="1600" b="0" dirty="0">
+                <a:solidFill>
+                  <a:srgbClr val="9AA0A6"/>
+                </a:solidFill>
+                <a:latin typeface="Arial"/>
+              </a:rPr>
+              <a:t>  ·  </a:t>
+            </a:r>
+            <a:r>
+              <a:rPr sz="1600" b="0" dirty="0" err="1">
+                <a:solidFill>
+                  <a:srgbClr val="9AA0A6"/>
+                </a:solidFill>
+                <a:latin typeface="Arial"/>
+              </a:rPr>
+              <a:t>github.com</a:t>
+            </a:r>
+            <a:r>
+              <a:rPr sz="1600" b="0" dirty="0">
+                <a:solidFill>
+                  <a:srgbClr val="9AA0A6"/>
+                </a:solidFill>
+                <a:latin typeface="Arial"/>
+              </a:rPr>
+              <a:t>/</a:t>
+            </a:r>
+            <a:r>
+              <a:rPr sz="1600" b="0" dirty="0" err="1">
+                <a:solidFill>
+                  <a:srgbClr val="9AA0A6"/>
+                </a:solidFill>
+                <a:latin typeface="Arial"/>
+              </a:rPr>
+              <a:t>Gazzumatteo</a:t>
+            </a:r>
+            <a:r>
+              <a:rPr sz="1600" b="0" dirty="0">
+                <a:solidFill>
+                  <a:srgbClr val="9AA0A6"/>
+                </a:solidFill>
+                <a:latin typeface="Arial"/>
+              </a:rPr>
+              <a:t>/</a:t>
+            </a:r>
+            <a:r>
+              <a:rPr sz="1600" b="0" dirty="0" err="1">
+                <a:solidFill>
+                  <a:srgbClr val="9AA0A6"/>
+                </a:solidFill>
+                <a:latin typeface="Arial"/>
+              </a:rPr>
+              <a:t>adk</a:t>
+            </a:r>
+            <a:r>
+              <a:rPr sz="1600" b="0" dirty="0">
+                <a:solidFill>
+                  <a:srgbClr val="9AA0A6"/>
+                </a:solidFill>
+                <a:latin typeface="Arial"/>
+              </a:rPr>
+              <a:t>-meetup</a:t>
             </a:r>
           </a:p>
         </p:txBody>
@@ -6746,7 +6977,7 @@
 </file>
 
 <file path=ppt/slides/slide2.xml><?xml version="1.0" encoding="utf-8"?>
-<p:sld xmlns:a="http://schemas.openxmlformats.org/drawingml/2006/main" xmlns:p="http://schemas.openxmlformats.org/presentationml/2006/main" xmlns:r="http://schemas.openxmlformats.org/officeDocument/2006/relationships">
+<p:sld xmlns:a="http://schemas.openxmlformats.org/drawingml/2006/main" xmlns:r="http://schemas.openxmlformats.org/officeDocument/2006/relationships" xmlns:p="http://schemas.openxmlformats.org/presentationml/2006/main">
   <p:cSld>
     <p:bg>
       <p:bgPr>
@@ -6762,7 +6993,14 @@
         <p:cNvGrpSpPr/>
         <p:nvPr/>
       </p:nvGrpSpPr>
-      <p:grpSpPr/>
+      <p:grpSpPr>
+        <a:xfrm>
+          <a:off x="0" y="0"/>
+          <a:ext cx="0" cy="0"/>
+          <a:chOff x="0" y="0"/>
+          <a:chExt cx="0" cy="0"/>
+        </a:xfrm>
+      </p:grpSpPr>
       <p:sp>
         <p:nvSpPr>
           <p:cNvPr id="2" name="Rectangle 1"/>
@@ -6803,6 +7041,7 @@
           <a:lstStyle/>
           <a:p>
             <a:pPr algn="ctr"/>
+            <a:endParaRPr/>
           </a:p>
         </p:txBody>
       </p:sp>
@@ -7269,7 +7508,7 @@
 </file>
 
 <file path=ppt/slides/slide3.xml><?xml version="1.0" encoding="utf-8"?>
-<p:sld xmlns:a="http://schemas.openxmlformats.org/drawingml/2006/main" xmlns:p="http://schemas.openxmlformats.org/presentationml/2006/main" xmlns:r="http://schemas.openxmlformats.org/officeDocument/2006/relationships">
+<p:sld xmlns:a="http://schemas.openxmlformats.org/drawingml/2006/main" xmlns:r="http://schemas.openxmlformats.org/officeDocument/2006/relationships" xmlns:p="http://schemas.openxmlformats.org/presentationml/2006/main">
   <p:cSld>
     <p:bg>
       <p:bgPr>
@@ -7285,7 +7524,14 @@
         <p:cNvGrpSpPr/>
         <p:nvPr/>
       </p:nvGrpSpPr>
-      <p:grpSpPr/>
+      <p:grpSpPr>
+        <a:xfrm>
+          <a:off x="0" y="0"/>
+          <a:ext cx="0" cy="0"/>
+          <a:chOff x="0" y="0"/>
+          <a:chExt cx="0" cy="0"/>
+        </a:xfrm>
+      </p:grpSpPr>
       <p:sp>
         <p:nvSpPr>
           <p:cNvPr id="2" name="Rectangle 1"/>
@@ -7326,6 +7572,7 @@
           <a:lstStyle/>
           <a:p>
             <a:pPr algn="ctr"/>
+            <a:endParaRPr/>
           </a:p>
         </p:txBody>
       </p:sp>
@@ -7438,6 +7685,7 @@
           <a:lstStyle/>
           <a:p>
             <a:pPr algn="ctr"/>
+            <a:endParaRPr/>
           </a:p>
         </p:txBody>
       </p:sp>
@@ -7516,6 +7764,7 @@
           <a:lstStyle/>
           <a:p>
             <a:pPr algn="ctr"/>
+            <a:endParaRPr/>
           </a:p>
         </p:txBody>
       </p:sp>
@@ -7594,6 +7843,7 @@
           <a:lstStyle/>
           <a:p>
             <a:pPr algn="ctr"/>
+            <a:endParaRPr/>
           </a:p>
         </p:txBody>
       </p:sp>
@@ -7672,6 +7922,7 @@
           <a:lstStyle/>
           <a:p>
             <a:pPr algn="ctr"/>
+            <a:endParaRPr/>
           </a:p>
         </p:txBody>
       </p:sp>
@@ -7750,6 +8001,7 @@
           <a:lstStyle/>
           <a:p>
             <a:pPr algn="ctr"/>
+            <a:endParaRPr/>
           </a:p>
         </p:txBody>
       </p:sp>
@@ -7828,6 +8080,7 @@
           <a:lstStyle/>
           <a:p>
             <a:pPr algn="ctr"/>
+            <a:endParaRPr/>
           </a:p>
         </p:txBody>
       </p:sp>
@@ -7906,6 +8159,7 @@
           <a:lstStyle/>
           <a:p>
             <a:pPr algn="ctr"/>
+            <a:endParaRPr/>
           </a:p>
         </p:txBody>
       </p:sp>
@@ -7984,6 +8238,7 @@
           <a:lstStyle/>
           <a:p>
             <a:pPr algn="ctr"/>
+            <a:endParaRPr/>
           </a:p>
         </p:txBody>
       </p:sp>
@@ -8062,6 +8317,7 @@
           <a:lstStyle/>
           <a:p>
             <a:pPr algn="ctr"/>
+            <a:endParaRPr/>
           </a:p>
         </p:txBody>
       </p:sp>
@@ -8140,6 +8396,7 @@
           <a:lstStyle/>
           <a:p>
             <a:pPr algn="ctr"/>
+            <a:endParaRPr/>
           </a:p>
         </p:txBody>
       </p:sp>
@@ -8218,6 +8475,7 @@
           <a:lstStyle/>
           <a:p>
             <a:pPr algn="ctr"/>
+            <a:endParaRPr/>
           </a:p>
         </p:txBody>
       </p:sp>
@@ -8296,6 +8554,7 @@
           <a:lstStyle/>
           <a:p>
             <a:pPr algn="ctr"/>
+            <a:endParaRPr/>
           </a:p>
         </p:txBody>
       </p:sp>
@@ -8378,7 +8637,7 @@
 </file>
 
 <file path=ppt/slides/slide4.xml><?xml version="1.0" encoding="utf-8"?>
-<p:sld xmlns:a="http://schemas.openxmlformats.org/drawingml/2006/main" xmlns:p="http://schemas.openxmlformats.org/presentationml/2006/main" xmlns:r="http://schemas.openxmlformats.org/officeDocument/2006/relationships">
+<p:sld xmlns:a="http://schemas.openxmlformats.org/drawingml/2006/main" xmlns:r="http://schemas.openxmlformats.org/officeDocument/2006/relationships" xmlns:p="http://schemas.openxmlformats.org/presentationml/2006/main">
   <p:cSld>
     <p:bg>
       <p:bgPr>
@@ -8394,7 +8653,14 @@
         <p:cNvGrpSpPr/>
         <p:nvPr/>
       </p:nvGrpSpPr>
-      <p:grpSpPr/>
+      <p:grpSpPr>
+        <a:xfrm>
+          <a:off x="0" y="0"/>
+          <a:ext cx="0" cy="0"/>
+          <a:chOff x="0" y="0"/>
+          <a:chExt cx="0" cy="0"/>
+        </a:xfrm>
+      </p:grpSpPr>
       <p:sp>
         <p:nvSpPr>
           <p:cNvPr id="2" name="Rectangle 1"/>
@@ -8435,6 +8701,7 @@
           <a:lstStyle/>
           <a:p>
             <a:pPr algn="ctr"/>
+            <a:endParaRPr/>
           </a:p>
         </p:txBody>
       </p:sp>
@@ -8617,6 +8884,7 @@
           <a:lstStyle/>
           <a:p>
             <a:pPr algn="ctr"/>
+            <a:endParaRPr/>
           </a:p>
         </p:txBody>
       </p:sp>
@@ -8730,6 +8998,7 @@
           <a:lstStyle/>
           <a:p>
             <a:pPr algn="ctr"/>
+            <a:endParaRPr/>
           </a:p>
         </p:txBody>
       </p:sp>
@@ -8843,6 +9112,7 @@
           <a:lstStyle/>
           <a:p>
             <a:pPr algn="ctr"/>
+            <a:endParaRPr/>
           </a:p>
         </p:txBody>
       </p:sp>
@@ -8956,6 +9226,7 @@
           <a:lstStyle/>
           <a:p>
             <a:pPr algn="ctr"/>
+            <a:endParaRPr/>
           </a:p>
         </p:txBody>
       </p:sp>
@@ -9069,6 +9340,7 @@
           <a:lstStyle/>
           <a:p>
             <a:pPr algn="ctr"/>
+            <a:endParaRPr/>
           </a:p>
         </p:txBody>
       </p:sp>
@@ -9114,6 +9386,7 @@
           <a:lstStyle/>
           <a:p>
             <a:pPr algn="ctr"/>
+            <a:endParaRPr/>
           </a:p>
         </p:txBody>
       </p:sp>
@@ -9441,7 +9714,7 @@
 </file>
 
 <file path=ppt/slides/slide5.xml><?xml version="1.0" encoding="utf-8"?>
-<p:sld xmlns:a="http://schemas.openxmlformats.org/drawingml/2006/main" xmlns:p="http://schemas.openxmlformats.org/presentationml/2006/main" xmlns:r="http://schemas.openxmlformats.org/officeDocument/2006/relationships">
+<p:sld xmlns:a="http://schemas.openxmlformats.org/drawingml/2006/main" xmlns:r="http://schemas.openxmlformats.org/officeDocument/2006/relationships" xmlns:p="http://schemas.openxmlformats.org/presentationml/2006/main">
   <p:cSld>
     <p:bg>
       <p:bgPr>
@@ -9457,7 +9730,14 @@
         <p:cNvGrpSpPr/>
         <p:nvPr/>
       </p:nvGrpSpPr>
-      <p:grpSpPr/>
+      <p:grpSpPr>
+        <a:xfrm>
+          <a:off x="0" y="0"/>
+          <a:ext cx="0" cy="0"/>
+          <a:chOff x="0" y="0"/>
+          <a:chExt cx="0" cy="0"/>
+        </a:xfrm>
+      </p:grpSpPr>
       <p:sp>
         <p:nvSpPr>
           <p:cNvPr id="2" name="Rectangle 1"/>
@@ -9498,6 +9778,7 @@
           <a:lstStyle/>
           <a:p>
             <a:pPr algn="ctr"/>
+            <a:endParaRPr/>
           </a:p>
         </p:txBody>
       </p:sp>
@@ -9603,7 +9884,7 @@
 </file>
 
 <file path=ppt/slides/slide6.xml><?xml version="1.0" encoding="utf-8"?>
-<p:sld xmlns:a="http://schemas.openxmlformats.org/drawingml/2006/main" xmlns:p="http://schemas.openxmlformats.org/presentationml/2006/main" xmlns:r="http://schemas.openxmlformats.org/officeDocument/2006/relationships">
+<p:sld xmlns:a="http://schemas.openxmlformats.org/drawingml/2006/main" xmlns:r="http://schemas.openxmlformats.org/officeDocument/2006/relationships" xmlns:p="http://schemas.openxmlformats.org/presentationml/2006/main">
   <p:cSld>
     <p:bg>
       <p:bgPr>
@@ -9619,7 +9900,14 @@
         <p:cNvGrpSpPr/>
         <p:nvPr/>
       </p:nvGrpSpPr>
-      <p:grpSpPr/>
+      <p:grpSpPr>
+        <a:xfrm>
+          <a:off x="0" y="0"/>
+          <a:ext cx="0" cy="0"/>
+          <a:chOff x="0" y="0"/>
+          <a:chExt cx="0" cy="0"/>
+        </a:xfrm>
+      </p:grpSpPr>
       <p:sp>
         <p:nvSpPr>
           <p:cNvPr id="2" name="Rectangle 1"/>
@@ -9660,6 +9948,7 @@
           <a:lstStyle/>
           <a:p>
             <a:pPr algn="ctr"/>
+            <a:endParaRPr/>
           </a:p>
         </p:txBody>
       </p:sp>
@@ -9774,6 +10063,7 @@
           <a:lstStyle/>
           <a:p>
             <a:pPr algn="ctr"/>
+            <a:endParaRPr/>
           </a:p>
         </p:txBody>
       </p:sp>
@@ -9994,6 +10284,7 @@
           <a:lstStyle/>
           <a:p>
             <a:pPr algn="ctr"/>
+            <a:endParaRPr/>
           </a:p>
         </p:txBody>
       </p:sp>
@@ -10212,6 +10503,7 @@
           <a:lstStyle/>
           <a:p>
             <a:pPr algn="ctr"/>
+            <a:endParaRPr/>
           </a:p>
         </p:txBody>
       </p:sp>
@@ -10259,7 +10551,7 @@
 </file>
 
 <file path=ppt/slides/slide7.xml><?xml version="1.0" encoding="utf-8"?>
-<p:sld xmlns:a="http://schemas.openxmlformats.org/drawingml/2006/main" xmlns:p="http://schemas.openxmlformats.org/presentationml/2006/main" xmlns:r="http://schemas.openxmlformats.org/officeDocument/2006/relationships">
+<p:sld xmlns:a="http://schemas.openxmlformats.org/drawingml/2006/main" xmlns:r="http://schemas.openxmlformats.org/officeDocument/2006/relationships" xmlns:p="http://schemas.openxmlformats.org/presentationml/2006/main">
   <p:cSld>
     <p:bg>
       <p:bgPr>
@@ -10275,7 +10567,14 @@
         <p:cNvGrpSpPr/>
         <p:nvPr/>
       </p:nvGrpSpPr>
-      <p:grpSpPr/>
+      <p:grpSpPr>
+        <a:xfrm>
+          <a:off x="0" y="0"/>
+          <a:ext cx="0" cy="0"/>
+          <a:chOff x="0" y="0"/>
+          <a:chExt cx="0" cy="0"/>
+        </a:xfrm>
+      </p:grpSpPr>
       <p:sp>
         <p:nvSpPr>
           <p:cNvPr id="2" name="Rectangle 1"/>
@@ -10316,6 +10615,7 @@
           <a:lstStyle/>
           <a:p>
             <a:pPr algn="ctr"/>
+            <a:endParaRPr/>
           </a:p>
         </p:txBody>
       </p:sp>
@@ -10421,7 +10721,7 @@
 </file>
 
 <file path=ppt/slides/slide8.xml><?xml version="1.0" encoding="utf-8"?>
-<p:sld xmlns:a="http://schemas.openxmlformats.org/drawingml/2006/main" xmlns:p="http://schemas.openxmlformats.org/presentationml/2006/main" xmlns:r="http://schemas.openxmlformats.org/officeDocument/2006/relationships">
+<p:sld xmlns:a="http://schemas.openxmlformats.org/drawingml/2006/main" xmlns:r="http://schemas.openxmlformats.org/officeDocument/2006/relationships" xmlns:p="http://schemas.openxmlformats.org/presentationml/2006/main">
   <p:cSld>
     <p:bg>
       <p:bgPr>
@@ -10437,7 +10737,14 @@
         <p:cNvGrpSpPr/>
         <p:nvPr/>
       </p:nvGrpSpPr>
-      <p:grpSpPr/>
+      <p:grpSpPr>
+        <a:xfrm>
+          <a:off x="0" y="0"/>
+          <a:ext cx="0" cy="0"/>
+          <a:chOff x="0" y="0"/>
+          <a:chExt cx="0" cy="0"/>
+        </a:xfrm>
+      </p:grpSpPr>
       <p:sp>
         <p:nvSpPr>
           <p:cNvPr id="2" name="Rectangle 1"/>
@@ -10478,6 +10785,7 @@
           <a:lstStyle/>
           <a:p>
             <a:pPr algn="ctr"/>
+            <a:endParaRPr/>
           </a:p>
         </p:txBody>
       </p:sp>
@@ -10583,7 +10891,7 @@
 </file>
 
 <file path=ppt/slides/slide9.xml><?xml version="1.0" encoding="utf-8"?>
-<p:sld xmlns:a="http://schemas.openxmlformats.org/drawingml/2006/main" xmlns:p="http://schemas.openxmlformats.org/presentationml/2006/main" xmlns:r="http://schemas.openxmlformats.org/officeDocument/2006/relationships">
+<p:sld xmlns:a="http://schemas.openxmlformats.org/drawingml/2006/main" xmlns:r="http://schemas.openxmlformats.org/officeDocument/2006/relationships" xmlns:p="http://schemas.openxmlformats.org/presentationml/2006/main">
   <p:cSld>
     <p:bg>
       <p:bgPr>
@@ -10599,7 +10907,14 @@
         <p:cNvGrpSpPr/>
         <p:nvPr/>
       </p:nvGrpSpPr>
-      <p:grpSpPr/>
+      <p:grpSpPr>
+        <a:xfrm>
+          <a:off x="0" y="0"/>
+          <a:ext cx="0" cy="0"/>
+          <a:chOff x="0" y="0"/>
+          <a:chExt cx="0" cy="0"/>
+        </a:xfrm>
+      </p:grpSpPr>
       <p:sp>
         <p:nvSpPr>
           <p:cNvPr id="2" name="Rectangle 1"/>
@@ -10640,6 +10955,7 @@
           <a:lstStyle/>
           <a:p>
             <a:pPr algn="ctr"/>
+            <a:endParaRPr/>
           </a:p>
         </p:txBody>
       </p:sp>
@@ -10754,6 +11070,7 @@
           <a:lstStyle/>
           <a:p>
             <a:pPr algn="ctr"/>
+            <a:endParaRPr/>
           </a:p>
         </p:txBody>
       </p:sp>
@@ -10974,6 +11291,7 @@
           <a:lstStyle/>
           <a:p>
             <a:pPr algn="ctr"/>
+            <a:endParaRPr/>
           </a:p>
         </p:txBody>
       </p:sp>
